--- a/final_docs/final_presentation/STAR_Final_Presentation.pptx
+++ b/final_docs/final_presentation/STAR_Final_Presentation.pptx
@@ -5,65 +5,67 @@
     <p:sldMasterId id="2147483648" r:id="rId1"/>
   </p:sldMasterIdLst>
   <p:notesMasterIdLst>
-    <p:notesMasterId r:id="rId9"/>
+    <p:notesMasterId r:id="rId16"/>
   </p:notesMasterIdLst>
   <p:sldIdLst>
     <p:sldId id="256" r:id="rId2"/>
-    <p:sldId id="263" r:id="rId31"/>
-    <p:sldId id="264" r:id="rId32"/>
-    <p:sldId id="265" r:id="rId33"/>
-    <p:sldId id="261" r:id="rId7"/>
-    <p:sldId id="266" r:id="rId34"/>
-    <p:sldId id="269" r:id="rId37"/>
-    <p:sldId id="267" r:id="rId35"/>
-    <p:sldId id="268" r:id="rId36"/>
-    <p:sldId id="260" r:id="rId6"/>
-    <p:sldId id="258" r:id="rId4"/>
-    <p:sldId id="257" r:id="rId3"/>
-    <p:sldId id="270" r:id="rId38"/>
-    <p:sldId id="262" r:id="rId8"/>
+    <p:sldId id="263" r:id="rId3"/>
+    <p:sldId id="264" r:id="rId4"/>
+    <p:sldId id="265" r:id="rId5"/>
+    <p:sldId id="261" r:id="rId6"/>
+    <p:sldId id="266" r:id="rId7"/>
+    <p:sldId id="269" r:id="rId8"/>
+    <p:sldId id="267" r:id="rId9"/>
+    <p:sldId id="268" r:id="rId10"/>
+    <p:sldId id="260" r:id="rId11"/>
+    <p:sldId id="258" r:id="rId12"/>
+    <p:sldId id="257" r:id="rId13"/>
+    <p:sldId id="270" r:id="rId14"/>
+    <p:sldId id="262" r:id="rId15"/>
   </p:sldIdLst>
   <p:sldSz cx="12192000" cy="6858000"/>
   <p:notesSz cx="6858000" cy="9144000"/>
   <p:embeddedFontLst>
     <p:embeddedFont>
       <p:font typeface="Arial Black" panose="020B0604020202020204" pitchFamily="34" charset="0"/>
-      <p:bold r:id="rId10"/>
+      <p:bold r:id="rId17"/>
     </p:embeddedFont>
     <p:embeddedFont>
       <p:font typeface="Arial Narrow" panose="020B0604020202020204" pitchFamily="34" charset="0"/>
-      <p:regular r:id="rId11"/>
-      <p:bold r:id="rId12"/>
-      <p:italic r:id="rId13"/>
-      <p:boldItalic r:id="rId14"/>
+      <p:regular r:id="rId18"/>
+      <p:bold r:id="rId19"/>
+      <p:italic r:id="rId20"/>
+      <p:boldItalic r:id="rId21"/>
     </p:embeddedFont>
     <p:embeddedFont>
       <p:font typeface="Open Sans" panose="020B0606030504020204" pitchFamily="34" charset="0"/>
-      <p:regular r:id="rId15"/>
-      <p:bold r:id="rId16"/>
-      <p:italic r:id="rId17"/>
-      <p:boldItalic r:id="rId18"/>
+      <p:regular r:id="rId22"/>
+      <p:bold r:id="rId23"/>
+      <p:italic r:id="rId24"/>
+      <p:boldItalic r:id="rId25"/>
     </p:embeddedFont>
     <p:embeddedFont>
-      <p:font typeface="Open Sans ExtraBold" panose="020B0606030504020204" pitchFamily="34" charset="0"/>
-      <p:bold r:id="rId19"/>
-      <p:boldItalic r:id="rId20"/>
+      <p:font typeface="Open Sans ExtraBold" panose="020B0906030804020204" pitchFamily="34" charset="0"/>
+      <p:bold r:id="rId26"/>
+      <p:italic r:id="rId27"/>
+      <p:boldItalic r:id="rId28"/>
     </p:embeddedFont>
     <p:embeddedFont>
-      <p:font typeface="Open Sans ExtraBold" panose="020B0606030504020204" pitchFamily="34" charset="0"/>
-      <p:bold r:id="rId19"/>
-      <p:boldItalic r:id="rId20"/>
+      <p:font typeface="Open Sans ExtraBold" panose="020B0906030804020204" pitchFamily="34" charset="0"/>
+      <p:bold r:id="rId26"/>
+      <p:italic r:id="rId27"/>
+      <p:boldItalic r:id="rId28"/>
     </p:embeddedFont>
     <p:embeddedFont>
-      <p:font typeface="Oswald" panose="02000603000000000000" pitchFamily="2" charset="77"/>
-      <p:regular r:id="rId21"/>
-      <p:bold r:id="rId22"/>
-      <p:italic r:id="rId23"/>
-      <p:boldItalic r:id="rId24"/>
+      <p:font typeface="Oswald" pitchFamily="2" charset="77"/>
+      <p:regular r:id="rId29"/>
+      <p:bold r:id="rId30"/>
+      <p:italic r:id="rId31"/>
+      <p:boldItalic r:id="rId32"/>
     </p:embeddedFont>
     <p:embeddedFont>
       <p:font typeface="OSWALD MEDIUMITALIC" panose="02000603000000000000" pitchFamily="2" charset="77"/>
-      <p:italic r:id="rId25"/>
+      <p:italic r:id="rId33"/>
     </p:embeddedFont>
   </p:embeddedFontLst>
   <p:defaultTextStyle>
@@ -300,7 +302,7 @@
       <p15:sldGuideLst xmlns:p15="http://schemas.microsoft.com/office/powerpoint/2012/main"/>
     </p:ext>
     <p:ext uri="GoogleSlidesCustomDataVersion2">
-      <go:slidesCustomData xmlns="" xmlns:mc="http://schemas.openxmlformats.org/markup-compatibility/2006" xmlns:mv="urn:schemas-microsoft-com:mac:vml" xmlns:c="http://schemas.openxmlformats.org/drawingml/2006/chart" xmlns:dgm="http://schemas.openxmlformats.org/drawingml/2006/diagram" xmlns:o="urn:schemas-microsoft-com:office:office" xmlns:v="urn:schemas-microsoft-com:vml" xmlns:pvml="urn:schemas-microsoft-com:office:powerpoint" xmlns:com="http://schemas.openxmlformats.org/drawingml/2006/compatibility" xmlns:p14="http://schemas.microsoft.com/office/powerpoint/2010/main" xmlns:p15="http://schemas.microsoft.com/office/powerpoint/2012/main" xmlns:ahyp="http://schemas.microsoft.com/office/drawing/2018/hyperlinkcolor" xmlns:go="http://customooxmlschemas.google.com/" r:id="rId26" roundtripDataSignature="AMtx7mjel7yHO2ytr50e6vkC5J+GYoAWPw=="/>
+      <go:slidesCustomData xmlns:go="http://customooxmlschemas.google.com/" xmlns:ahyp="http://schemas.microsoft.com/office/drawing/2018/hyperlinkcolor" xmlns:p15="http://schemas.microsoft.com/office/powerpoint/2012/main" xmlns:p14="http://schemas.microsoft.com/office/powerpoint/2010/main" xmlns:com="http://schemas.openxmlformats.org/drawingml/2006/compatibility" xmlns:pvml="urn:schemas-microsoft-com:office:powerpoint" xmlns:v="urn:schemas-microsoft-com:vml" xmlns:o="urn:schemas-microsoft-com:office:office" xmlns:dgm="http://schemas.openxmlformats.org/drawingml/2006/diagram" xmlns:c="http://schemas.openxmlformats.org/drawingml/2006/chart" xmlns:mv="urn:schemas-microsoft-com:mac:vml" xmlns:mc="http://schemas.openxmlformats.org/markup-compatibility/2006" xmlns="" r:id="rId34" roundtripDataSignature="AMtx7mjel7yHO2ytr50e6vkC5J+GYoAWPw=="/>
     </p:ext>
   </p:extLst>
 </p:presentation>
@@ -1597,11 +1599,11 @@
 </file>
 
 <file path=ppt/notesSlides/notesSlide10.xml><?xml version="1.0" encoding="utf-8"?>
-<p:notes xmlns:a="http://schemas.openxmlformats.org/drawingml/2006/main" xmlns:p="http://schemas.openxmlformats.org/presentationml/2006/main" xmlns:r="http://schemas.openxmlformats.org/officeDocument/2006/relationships">
+<p:notes xmlns:a="http://schemas.openxmlformats.org/drawingml/2006/main" xmlns:r="http://schemas.openxmlformats.org/officeDocument/2006/relationships" xmlns:p="http://schemas.openxmlformats.org/presentationml/2006/main" showMasterSp="0" showMasterPhAnim="0">
   <p:cSld>
     <p:spTree>
       <p:nvGrpSpPr>
-        <p:cNvPr id="1" name=""/>
+        <p:cNvPr id="1" name="Shape 104"/>
         <p:cNvGrpSpPr/>
         <p:nvPr/>
       </p:nvGrpSpPr>
@@ -1615,48 +1617,75 @@
       </p:grpSpPr>
       <p:sp>
         <p:nvSpPr>
-          <p:cNvPr id="2" name="Slide Image Placeholder 1"/>
-          <p:cNvSpPr>
-            <a:spLocks noGrp="1"/>
-          </p:cNvSpPr>
-          <p:nvPr>
-            <p:ph type="sldImg" idx="3"/>
-          </p:nvPr>
-        </p:nvSpPr>
-        <p:spPr/>
-      </p:sp>
-      <p:sp>
-        <p:nvSpPr>
-          <p:cNvPr id="3" name="Notes Placeholder 2"/>
-          <p:cNvSpPr>
+          <p:cNvPr id="105" name="Google Shape;105;p5:notes"/>
+          <p:cNvSpPr txBox="1">
             <a:spLocks noGrp="1"/>
           </p:cNvSpPr>
           <p:nvPr>
             <p:ph type="body" idx="1"/>
           </p:nvPr>
         </p:nvSpPr>
-        <p:spPr/>
+        <p:spPr>
+          <a:xfrm>
+            <a:off x="685800" y="4400550"/>
+            <a:ext cx="5486400" cy="3600450"/>
+          </a:xfrm>
+          <a:prstGeom prst="rect">
+            <a:avLst/>
+          </a:prstGeom>
+        </p:spPr>
         <p:txBody>
-          <a:bodyPr/>
+          <a:bodyPr spcFirstLastPara="1" wrap="square" lIns="91425" tIns="45700" rIns="91425" bIns="45700" anchor="t" anchorCtr="0">
+            <a:noAutofit/>
+          </a:bodyPr>
           <a:lstStyle/>
           <a:p>
             <a:r>
-              <a:t>The pipeline: sensors stream into the RX72N which closes motor loops at 250 Hz. The RX72N talks to the Pi 5 via a framed serial link - architected as SPI at 10 MHz with FEC and HARQ for production, but deployed for defense as a simpler USB-CDC ASCII bridge at 115,200 baud. The Pi 5 runs slam_toolbox, an EKF that fuses wheel odometry with the IMU, and Nav2 for path planning. The compliance engine sits on top, reads the fused map, and emits a PDF audit report.</a:t>
+              <a:t>Total BOM is approximately $864 with the PCB run included - well under our $2000 capstone target. The biggest line is sensors at $270, then compute at $182, drivetrain at $144, power and chassis at about $100 each. For comparison, Daxbot, the closest commercial service, is $920,000 for 950 miles of surveying. STAR fits a completely different economic envelope.</a:t>
             </a:r>
           </a:p>
         </p:txBody>
       </p:sp>
       <p:sp>
         <p:nvSpPr>
-          <p:cNvPr id="4" name="Slide Number Placeholder 3"/>
+          <p:cNvPr id="106" name="Google Shape;106;p5:notes"/>
           <p:cNvSpPr>
-            <a:spLocks noGrp="1"/>
+            <a:spLocks noGrp="1" noRot="1" noChangeAspect="1"/>
           </p:cNvSpPr>
           <p:nvPr>
-            <p:ph type="sldNum" idx="12"/>
+            <p:ph type="sldImg" idx="2"/>
           </p:nvPr>
         </p:nvSpPr>
-        <p:spPr/>
+        <p:spPr>
+          <a:xfrm>
+            <a:off x="685800" y="1143000"/>
+            <a:ext cx="5486400" cy="3086100"/>
+          </a:xfrm>
+          <a:custGeom>
+            <a:avLst/>
+            <a:gdLst/>
+            <a:ahLst/>
+            <a:cxnLst/>
+            <a:rect l="l" t="t" r="r" b="b"/>
+            <a:pathLst>
+              <a:path w="120000" h="120000" extrusionOk="0">
+                <a:moveTo>
+                  <a:pt x="0" y="0"/>
+                </a:moveTo>
+                <a:lnTo>
+                  <a:pt x="120000" y="0"/>
+                </a:lnTo>
+                <a:lnTo>
+                  <a:pt x="120000" y="120000"/>
+                </a:lnTo>
+                <a:lnTo>
+                  <a:pt x="0" y="120000"/>
+                </a:lnTo>
+                <a:close/>
+              </a:path>
+            </a:pathLst>
+          </a:custGeom>
+        </p:spPr>
       </p:sp>
     </p:spTree>
   </p:cSld>
@@ -1667,11 +1696,11 @@
 </file>
 
 <file path=ppt/notesSlides/notesSlide11.xml><?xml version="1.0" encoding="utf-8"?>
-<p:notes xmlns:a="http://schemas.openxmlformats.org/drawingml/2006/main" xmlns:p="http://schemas.openxmlformats.org/presentationml/2006/main" xmlns:r="http://schemas.openxmlformats.org/officeDocument/2006/relationships">
+<p:notes xmlns:a="http://schemas.openxmlformats.org/drawingml/2006/main" xmlns:r="http://schemas.openxmlformats.org/officeDocument/2006/relationships" xmlns:p="http://schemas.openxmlformats.org/presentationml/2006/main" showMasterSp="0" showMasterPhAnim="0">
   <p:cSld>
     <p:spTree>
       <p:nvGrpSpPr>
-        <p:cNvPr id="1" name=""/>
+        <p:cNvPr id="1" name="Shape 88"/>
         <p:cNvGrpSpPr/>
         <p:nvPr/>
       </p:nvGrpSpPr>
@@ -1685,48 +1714,75 @@
       </p:grpSpPr>
       <p:sp>
         <p:nvSpPr>
-          <p:cNvPr id="2" name="Slide Image Placeholder 1"/>
-          <p:cNvSpPr>
-            <a:spLocks noGrp="1"/>
-          </p:cNvSpPr>
-          <p:nvPr>
-            <p:ph type="sldImg" idx="3"/>
-          </p:nvPr>
-        </p:nvSpPr>
-        <p:spPr/>
-      </p:sp>
-      <p:sp>
-        <p:nvSpPr>
-          <p:cNvPr id="3" name="Notes Placeholder 2"/>
-          <p:cNvSpPr>
+          <p:cNvPr id="89" name="Google Shape;89;p3:notes"/>
+          <p:cNvSpPr txBox="1">
             <a:spLocks noGrp="1"/>
           </p:cNvSpPr>
           <p:nvPr>
             <p:ph type="body" idx="1"/>
           </p:nvPr>
         </p:nvSpPr>
-        <p:spPr/>
+        <p:spPr>
+          <a:xfrm>
+            <a:off x="685800" y="4400550"/>
+            <a:ext cx="5486400" cy="3600450"/>
+          </a:xfrm>
+          <a:prstGeom prst="rect">
+            <a:avLst/>
+          </a:prstGeom>
+        </p:spPr>
         <p:txBody>
-          <a:bodyPr/>
+          <a:bodyPr spcFirstLastPara="1" wrap="square" lIns="91425" tIns="45700" rIns="91425" bIns="45700" anchor="t" anchorCtr="0">
+            <a:noAutofit/>
+          </a:bodyPr>
           <a:lstStyle/>
           <a:p>
             <a:r>
-              <a:t>Seven ADA geometric checks, mapped to three status tiers. Ramp slope is fully IMPLEMENTED with measured ground truth. Trip hazard and path width are STRETCH - scaffolding exists, full algorithm pending. The other four are ARCHITECTED: every node has a Python file in the repo, message schemas exist, but the geometric logic is empty.</a:t>
+              <a:t>Now let us talk about who STAR helps and where it could go from here.</a:t>
             </a:r>
           </a:p>
         </p:txBody>
       </p:sp>
       <p:sp>
         <p:nvSpPr>
-          <p:cNvPr id="4" name="Slide Number Placeholder 3"/>
+          <p:cNvPr id="90" name="Google Shape;90;p3:notes"/>
           <p:cNvSpPr>
-            <a:spLocks noGrp="1"/>
+            <a:spLocks noGrp="1" noRot="1" noChangeAspect="1"/>
           </p:cNvSpPr>
           <p:nvPr>
-            <p:ph type="sldNum" idx="12"/>
+            <p:ph type="sldImg" idx="2"/>
           </p:nvPr>
         </p:nvSpPr>
-        <p:spPr/>
+        <p:spPr>
+          <a:xfrm>
+            <a:off x="685800" y="1143000"/>
+            <a:ext cx="5486400" cy="3086100"/>
+          </a:xfrm>
+          <a:custGeom>
+            <a:avLst/>
+            <a:gdLst/>
+            <a:ahLst/>
+            <a:cxnLst/>
+            <a:rect l="l" t="t" r="r" b="b"/>
+            <a:pathLst>
+              <a:path w="120000" h="120000" extrusionOk="0">
+                <a:moveTo>
+                  <a:pt x="0" y="0"/>
+                </a:moveTo>
+                <a:lnTo>
+                  <a:pt x="120000" y="0"/>
+                </a:lnTo>
+                <a:lnTo>
+                  <a:pt x="120000" y="120000"/>
+                </a:lnTo>
+                <a:lnTo>
+                  <a:pt x="0" y="120000"/>
+                </a:lnTo>
+                <a:close/>
+              </a:path>
+            </a:pathLst>
+          </a:custGeom>
+        </p:spPr>
       </p:sp>
     </p:spTree>
   </p:cSld>
@@ -1737,216 +1793,6 @@
 </file>
 
 <file path=ppt/notesSlides/notesSlide12.xml><?xml version="1.0" encoding="utf-8"?>
-<p:notes xmlns:a="http://schemas.openxmlformats.org/drawingml/2006/main" xmlns:p="http://schemas.openxmlformats.org/presentationml/2006/main" xmlns:r="http://schemas.openxmlformats.org/officeDocument/2006/relationships">
-  <p:cSld>
-    <p:spTree>
-      <p:nvGrpSpPr>
-        <p:cNvPr id="1" name=""/>
-        <p:cNvGrpSpPr/>
-        <p:nvPr/>
-      </p:nvGrpSpPr>
-      <p:grpSpPr>
-        <a:xfrm>
-          <a:off x="0" y="0"/>
-          <a:ext cx="0" cy="0"/>
-          <a:chOff x="0" y="0"/>
-          <a:chExt cx="0" cy="0"/>
-        </a:xfrm>
-      </p:grpSpPr>
-      <p:sp>
-        <p:nvSpPr>
-          <p:cNvPr id="2" name="Slide Image Placeholder 1"/>
-          <p:cNvSpPr>
-            <a:spLocks noGrp="1"/>
-          </p:cNvSpPr>
-          <p:nvPr>
-            <p:ph type="sldImg" idx="3"/>
-          </p:nvPr>
-        </p:nvSpPr>
-        <p:spPr/>
-      </p:sp>
-      <p:sp>
-        <p:nvSpPr>
-          <p:cNvPr id="3" name="Notes Placeholder 2"/>
-          <p:cNvSpPr>
-            <a:spLocks noGrp="1"/>
-          </p:cNvSpPr>
-          <p:nvPr>
-            <p:ph type="body" idx="1"/>
-          </p:nvPr>
-        </p:nvSpPr>
-        <p:spPr/>
-        <p:txBody>
-          <a:bodyPr/>
-          <a:lstStyle/>
-          <a:p>
-            <a:r>
-              <a:t>For the live demo: we start the robot in MANUAL mode from the Grafana cockpit. We hand it off to AUTONOMY, Nav2 takes over, and frontier exploration drives the robot into a hallway. As it approaches the ramp, the compliance engine fits a plane to the LiDAR returns using RANSAC and cross-validates that against the BNO055 IMU pitch. If the agreement is within 0.5 degrees and the slope exceeds 4.76 degrees, the engine flags a Title III violation and logs the ground-truth measurement to the audit report.</a:t>
-            </a:r>
-          </a:p>
-        </p:txBody>
-      </p:sp>
-      <p:sp>
-        <p:nvSpPr>
-          <p:cNvPr id="4" name="Slide Number Placeholder 3"/>
-          <p:cNvSpPr>
-            <a:spLocks noGrp="1"/>
-          </p:cNvSpPr>
-          <p:nvPr>
-            <p:ph type="sldNum" idx="12"/>
-          </p:nvPr>
-        </p:nvSpPr>
-        <p:spPr/>
-      </p:sp>
-    </p:spTree>
-  </p:cSld>
-  <p:clrMapOvr>
-    <a:masterClrMapping/>
-  </p:clrMapOvr>
-</p:notes>
-</file>
-
-<file path=ppt/notesSlides/notesSlide13.xml><?xml version="1.0" encoding="utf-8"?>
-<p:notes xmlns:a="http://schemas.openxmlformats.org/drawingml/2006/main" xmlns:p="http://schemas.openxmlformats.org/presentationml/2006/main" xmlns:r="http://schemas.openxmlformats.org/officeDocument/2006/relationships">
-  <p:cSld>
-    <p:spTree>
-      <p:nvGrpSpPr>
-        <p:cNvPr id="1" name=""/>
-        <p:cNvGrpSpPr/>
-        <p:nvPr/>
-      </p:nvGrpSpPr>
-      <p:grpSpPr>
-        <a:xfrm>
-          <a:off x="0" y="0"/>
-          <a:ext cx="0" cy="0"/>
-          <a:chOff x="0" y="0"/>
-          <a:chExt cx="0" cy="0"/>
-        </a:xfrm>
-      </p:grpSpPr>
-      <p:sp>
-        <p:nvSpPr>
-          <p:cNvPr id="2" name="Slide Image Placeholder 1"/>
-          <p:cNvSpPr>
-            <a:spLocks noGrp="1"/>
-          </p:cNvSpPr>
-          <p:nvPr>
-            <p:ph type="sldImg" idx="3"/>
-          </p:nvPr>
-        </p:nvSpPr>
-        <p:spPr/>
-      </p:sp>
-      <p:sp>
-        <p:nvSpPr>
-          <p:cNvPr id="3" name="Notes Placeholder 2"/>
-          <p:cNvSpPr>
-            <a:spLocks noGrp="1"/>
-          </p:cNvSpPr>
-          <p:nvPr>
-            <p:ph type="body" idx="1"/>
-          </p:nvPr>
-        </p:nvSpPr>
-        <p:spPr/>
-        <p:txBody>
-          <a:bodyPr/>
-          <a:lstStyle/>
-          <a:p>
-            <a:r>
-              <a:t>Validation in three layers. Software: 60 firmware Unity tests passing at 100% library coverage, 74% gateway coverage, 14 ROS 2 tests, 12 compliance pytest modules. Hardware: nine manual PCB validation checks, all passing first-pass, including motor free-spin and loaded-chassis with current measurements and scope-probed PWM. Field: we mapped 200 square feet of Thompson Hall on the Texas A&amp;M campus and detected two ADA compliance issues.</a:t>
-            </a:r>
-          </a:p>
-        </p:txBody>
-      </p:sp>
-      <p:sp>
-        <p:nvSpPr>
-          <p:cNvPr id="4" name="Slide Number Placeholder 3"/>
-          <p:cNvSpPr>
-            <a:spLocks noGrp="1"/>
-          </p:cNvSpPr>
-          <p:nvPr>
-            <p:ph type="sldNum" idx="12"/>
-          </p:nvPr>
-        </p:nvSpPr>
-        <p:spPr/>
-      </p:sp>
-    </p:spTree>
-  </p:cSld>
-  <p:clrMapOvr>
-    <a:masterClrMapping/>
-  </p:clrMapOvr>
-</p:notes>
-</file>
-
-<file path=ppt/notesSlides/notesSlide14.xml><?xml version="1.0" encoding="utf-8"?>
-<p:notes xmlns:a="http://schemas.openxmlformats.org/drawingml/2006/main" xmlns:p="http://schemas.openxmlformats.org/presentationml/2006/main" xmlns:r="http://schemas.openxmlformats.org/officeDocument/2006/relationships">
-  <p:cSld>
-    <p:spTree>
-      <p:nvGrpSpPr>
-        <p:cNvPr id="1" name=""/>
-        <p:cNvGrpSpPr/>
-        <p:nvPr/>
-      </p:nvGrpSpPr>
-      <p:grpSpPr>
-        <a:xfrm>
-          <a:off x="0" y="0"/>
-          <a:ext cx="0" cy="0"/>
-          <a:chOff x="0" y="0"/>
-          <a:chExt cx="0" cy="0"/>
-        </a:xfrm>
-      </p:grpSpPr>
-      <p:sp>
-        <p:nvSpPr>
-          <p:cNvPr id="2" name="Slide Image Placeholder 1"/>
-          <p:cNvSpPr>
-            <a:spLocks noGrp="1"/>
-          </p:cNvSpPr>
-          <p:nvPr>
-            <p:ph type="sldImg" idx="3"/>
-          </p:nvPr>
-        </p:nvSpPr>
-        <p:spPr/>
-      </p:sp>
-      <p:sp>
-        <p:nvSpPr>
-          <p:cNvPr id="3" name="Notes Placeholder 2"/>
-          <p:cNvSpPr>
-            <a:spLocks noGrp="1"/>
-          </p:cNvSpPr>
-          <p:nvPr>
-            <p:ph type="body" idx="1"/>
-          </p:nvPr>
-        </p:nvSpPr>
-        <p:spPr/>
-        <p:txBody>
-          <a:bodyPr/>
-          <a:lstStyle/>
-          <a:p>
-            <a:r>
-              <a:t>We are happy to take questions. The team is six people. I am Cesar Magana, project manager and software lead. Brighton Sikarskie ran firmware, compliance engine, infra, and schematic. Jeremie Hockey did PCB layout. Michael Norton owned mechanical design. Shawn Ciaciura and Jared Bartz contributed schematic review. Source code is open at github.com/Locked-Inc/STAR.</a:t>
-            </a:r>
-          </a:p>
-        </p:txBody>
-      </p:sp>
-      <p:sp>
-        <p:nvSpPr>
-          <p:cNvPr id="4" name="Slide Number Placeholder 3"/>
-          <p:cNvSpPr>
-            <a:spLocks noGrp="1"/>
-          </p:cNvSpPr>
-          <p:nvPr>
-            <p:ph type="sldNum" idx="12"/>
-          </p:nvPr>
-        </p:nvSpPr>
-        <p:spPr/>
-      </p:sp>
-    </p:spTree>
-  </p:cSld>
-  <p:clrMapOvr>
-    <a:masterClrMapping/>
-  </p:clrMapOvr>
-</p:notes>
-</file>
-
-<file path=ppt/notesSlides/notesSlide2.xml><?xml version="1.0" encoding="utf-8"?>
 <p:notes xmlns:a="http://schemas.openxmlformats.org/drawingml/2006/main" xmlns:r="http://schemas.openxmlformats.org/officeDocument/2006/relationships" xmlns:p="http://schemas.openxmlformats.org/presentationml/2006/main" showMasterSp="0" showMasterPhAnim="0">
   <p:cSld>
     <p:spTree>
@@ -2043,12 +1889,12 @@
 </p:notes>
 </file>
 
-<file path=ppt/notesSlides/notesSlide3.xml><?xml version="1.0" encoding="utf-8"?>
-<p:notes xmlns:a="http://schemas.openxmlformats.org/drawingml/2006/main" xmlns:r="http://schemas.openxmlformats.org/officeDocument/2006/relationships" xmlns:p="http://schemas.openxmlformats.org/presentationml/2006/main" showMasterSp="0" showMasterPhAnim="0">
+<file path=ppt/notesSlides/notesSlide13.xml><?xml version="1.0" encoding="utf-8"?>
+<p:notes xmlns:a="http://schemas.openxmlformats.org/drawingml/2006/main" xmlns:r="http://schemas.openxmlformats.org/officeDocument/2006/relationships" xmlns:p="http://schemas.openxmlformats.org/presentationml/2006/main">
   <p:cSld>
     <p:spTree>
       <p:nvGrpSpPr>
-        <p:cNvPr id="1" name="Shape 88"/>
+        <p:cNvPr id="1" name=""/>
         <p:cNvGrpSpPr/>
         <p:nvPr/>
       </p:nvGrpSpPr>
@@ -2062,7 +1908,77 @@
       </p:grpSpPr>
       <p:sp>
         <p:nvSpPr>
-          <p:cNvPr id="89" name="Google Shape;89;p3:notes"/>
+          <p:cNvPr id="2" name="Slide Image Placeholder 1"/>
+          <p:cNvSpPr>
+            <a:spLocks noGrp="1" noRot="1" noChangeAspect="1"/>
+          </p:cNvSpPr>
+          <p:nvPr>
+            <p:ph type="sldImg" idx="3"/>
+          </p:nvPr>
+        </p:nvSpPr>
+        <p:spPr/>
+      </p:sp>
+      <p:sp>
+        <p:nvSpPr>
+          <p:cNvPr id="3" name="Notes Placeholder 2"/>
+          <p:cNvSpPr>
+            <a:spLocks noGrp="1"/>
+          </p:cNvSpPr>
+          <p:nvPr>
+            <p:ph type="body" idx="1"/>
+          </p:nvPr>
+        </p:nvSpPr>
+        <p:spPr/>
+        <p:txBody>
+          <a:bodyPr/>
+          <a:lstStyle/>
+          <a:p>
+            <a:r>
+              <a:t>We are happy to take questions. The team is six people. I am Cesar Magana, project manager and software lead. Brighton Sikarskie ran firmware, compliance engine, infra, and schematic. Jeremie Hockey did PCB layout. Michael Norton owned mechanical design. Shawn Ciaciura and Jared Bartz contributed schematic review. Source code is open at github.com/Locked-Inc/STAR.</a:t>
+            </a:r>
+          </a:p>
+        </p:txBody>
+      </p:sp>
+      <p:sp>
+        <p:nvSpPr>
+          <p:cNvPr id="4" name="Slide Number Placeholder 3"/>
+          <p:cNvSpPr>
+            <a:spLocks noGrp="1"/>
+          </p:cNvSpPr>
+          <p:nvPr>
+            <p:ph type="sldNum" idx="12"/>
+          </p:nvPr>
+        </p:nvSpPr>
+        <p:spPr/>
+      </p:sp>
+    </p:spTree>
+  </p:cSld>
+  <p:clrMapOvr>
+    <a:masterClrMapping/>
+  </p:clrMapOvr>
+</p:notes>
+</file>
+
+<file path=ppt/notesSlides/notesSlide14.xml><?xml version="1.0" encoding="utf-8"?>
+<p:notes xmlns:a="http://schemas.openxmlformats.org/drawingml/2006/main" xmlns:r="http://schemas.openxmlformats.org/officeDocument/2006/relationships" xmlns:p="http://schemas.openxmlformats.org/presentationml/2006/main" showMasterSp="0" showMasterPhAnim="0">
+  <p:cSld>
+    <p:spTree>
+      <p:nvGrpSpPr>
+        <p:cNvPr id="1" name="Shape 122"/>
+        <p:cNvGrpSpPr/>
+        <p:nvPr/>
+      </p:nvGrpSpPr>
+      <p:grpSpPr>
+        <a:xfrm>
+          <a:off x="0" y="0"/>
+          <a:ext cx="0" cy="0"/>
+          <a:chOff x="0" y="0"/>
+          <a:chExt cx="0" cy="0"/>
+        </a:xfrm>
+      </p:grpSpPr>
+      <p:sp>
+        <p:nvSpPr>
+          <p:cNvPr id="123" name="Google Shape;123;p7:notes"/>
           <p:cNvSpPr txBox="1">
             <a:spLocks noGrp="1"/>
           </p:cNvSpPr>
@@ -2085,15 +2001,22 @@
           </a:bodyPr>
           <a:lstStyle/>
           <a:p>
-            <a:r>
-              <a:t>Now let us talk about who STAR helps and where it could go from here.</a:t>
-            </a:r>
+            <a:pPr marL="0" lvl="0" indent="0" algn="l" rtl="0">
+              <a:spcBef>
+                <a:spcPts val="0"/>
+              </a:spcBef>
+              <a:spcAft>
+                <a:spcPts val="0"/>
+              </a:spcAft>
+              <a:buNone/>
+            </a:pPr>
+            <a:endParaRPr/>
           </a:p>
         </p:txBody>
       </p:sp>
       <p:sp>
         <p:nvSpPr>
-          <p:cNvPr id="90" name="Google Shape;90;p3:notes"/>
+          <p:cNvPr id="124" name="Google Shape;124;p7:notes"/>
           <p:cNvSpPr>
             <a:spLocks noGrp="1" noRot="1" noChangeAspect="1"/>
           </p:cNvSpPr>
@@ -2140,8 +2063,8 @@
 </p:notes>
 </file>
 
-<file path=ppt/notesSlides/notesSlide4.xml><?xml version="1.0" encoding="utf-8"?>
-<p:notes xmlns:a="http://schemas.openxmlformats.org/drawingml/2006/main" xmlns:p="http://schemas.openxmlformats.org/presentationml/2006/main" xmlns:r="http://schemas.openxmlformats.org/officeDocument/2006/relationships">
+<file path=ppt/notesSlides/notesSlide2.xml><?xml version="1.0" encoding="utf-8"?>
+<p:notes xmlns:a="http://schemas.openxmlformats.org/drawingml/2006/main" xmlns:r="http://schemas.openxmlformats.org/officeDocument/2006/relationships" xmlns:p="http://schemas.openxmlformats.org/presentationml/2006/main">
   <p:cSld>
     <p:spTree>
       <p:nvGrpSpPr>
@@ -2161,7 +2084,7 @@
         <p:nvSpPr>
           <p:cNvPr id="2" name="Slide Image Placeholder 1"/>
           <p:cNvSpPr>
-            <a:spLocks noGrp="1"/>
+            <a:spLocks noGrp="1" noRot="1" noChangeAspect="1"/>
           </p:cNvSpPr>
           <p:nvPr>
             <p:ph type="sldImg" idx="3"/>
@@ -2186,6 +2109,146 @@
           <a:p>
             <a:r>
               <a:t>The federal civil penalty for a repeat ADA Title III violation is now $236,451 per occurrence as of the July 2025 Federal Register adjustment. In 2024 there were 8,800 federal Title III lawsuits filed. Manual audits by certified inspectors cost between $800 for a small store to over $50,000 for a campus, and take two to five days each. The economics push everything toward automation.</a:t>
+            </a:r>
+          </a:p>
+        </p:txBody>
+      </p:sp>
+      <p:sp>
+        <p:nvSpPr>
+          <p:cNvPr id="4" name="Slide Number Placeholder 3"/>
+          <p:cNvSpPr>
+            <a:spLocks noGrp="1"/>
+          </p:cNvSpPr>
+          <p:nvPr>
+            <p:ph type="sldNum" idx="12"/>
+          </p:nvPr>
+        </p:nvSpPr>
+        <p:spPr/>
+      </p:sp>
+    </p:spTree>
+  </p:cSld>
+  <p:clrMapOvr>
+    <a:masterClrMapping/>
+  </p:clrMapOvr>
+</p:notes>
+</file>
+
+<file path=ppt/notesSlides/notesSlide3.xml><?xml version="1.0" encoding="utf-8"?>
+<p:notes xmlns:a="http://schemas.openxmlformats.org/drawingml/2006/main" xmlns:r="http://schemas.openxmlformats.org/officeDocument/2006/relationships" xmlns:p="http://schemas.openxmlformats.org/presentationml/2006/main">
+  <p:cSld>
+    <p:spTree>
+      <p:nvGrpSpPr>
+        <p:cNvPr id="1" name=""/>
+        <p:cNvGrpSpPr/>
+        <p:nvPr/>
+      </p:nvGrpSpPr>
+      <p:grpSpPr>
+        <a:xfrm>
+          <a:off x="0" y="0"/>
+          <a:ext cx="0" cy="0"/>
+          <a:chOff x="0" y="0"/>
+          <a:chExt cx="0" cy="0"/>
+        </a:xfrm>
+      </p:grpSpPr>
+      <p:sp>
+        <p:nvSpPr>
+          <p:cNvPr id="2" name="Slide Image Placeholder 1"/>
+          <p:cNvSpPr>
+            <a:spLocks noGrp="1" noRot="1" noChangeAspect="1"/>
+          </p:cNvSpPr>
+          <p:nvPr>
+            <p:ph type="sldImg" idx="3"/>
+          </p:nvPr>
+        </p:nvSpPr>
+        <p:spPr/>
+      </p:sp>
+      <p:sp>
+        <p:nvSpPr>
+          <p:cNvPr id="3" name="Notes Placeholder 2"/>
+          <p:cNvSpPr>
+            <a:spLocks noGrp="1"/>
+          </p:cNvSpPr>
+          <p:nvPr>
+            <p:ph type="body" idx="1"/>
+          </p:nvPr>
+        </p:nvSpPr>
+        <p:spPr/>
+        <p:txBody>
+          <a:bodyPr/>
+          <a:lstStyle/>
+          <a:p>
+            <a:r>
+              <a:t>Despite decades of legislation, 73% of public-facing facilities fail at least one ADA standard. 31 million Americans have mobility disabilities. Only 32% of property buyers ask about ADA at all. The audit gap is real and it is structural.</a:t>
+            </a:r>
+          </a:p>
+        </p:txBody>
+      </p:sp>
+      <p:sp>
+        <p:nvSpPr>
+          <p:cNvPr id="4" name="Slide Number Placeholder 3"/>
+          <p:cNvSpPr>
+            <a:spLocks noGrp="1"/>
+          </p:cNvSpPr>
+          <p:nvPr>
+            <p:ph type="sldNum" idx="12"/>
+          </p:nvPr>
+        </p:nvSpPr>
+        <p:spPr/>
+      </p:sp>
+    </p:spTree>
+  </p:cSld>
+  <p:clrMapOvr>
+    <a:masterClrMapping/>
+  </p:clrMapOvr>
+</p:notes>
+</file>
+
+<file path=ppt/notesSlides/notesSlide4.xml><?xml version="1.0" encoding="utf-8"?>
+<p:notes xmlns:a="http://schemas.openxmlformats.org/drawingml/2006/main" xmlns:r="http://schemas.openxmlformats.org/officeDocument/2006/relationships" xmlns:p="http://schemas.openxmlformats.org/presentationml/2006/main">
+  <p:cSld>
+    <p:spTree>
+      <p:nvGrpSpPr>
+        <p:cNvPr id="1" name=""/>
+        <p:cNvGrpSpPr/>
+        <p:nvPr/>
+      </p:nvGrpSpPr>
+      <p:grpSpPr>
+        <a:xfrm>
+          <a:off x="0" y="0"/>
+          <a:ext cx="0" cy="0"/>
+          <a:chOff x="0" y="0"/>
+          <a:chExt cx="0" cy="0"/>
+        </a:xfrm>
+      </p:grpSpPr>
+      <p:sp>
+        <p:nvSpPr>
+          <p:cNvPr id="2" name="Slide Image Placeholder 1"/>
+          <p:cNvSpPr>
+            <a:spLocks noGrp="1" noRot="1" noChangeAspect="1"/>
+          </p:cNvSpPr>
+          <p:nvPr>
+            <p:ph type="sldImg" idx="3"/>
+          </p:nvPr>
+        </p:nvSpPr>
+        <p:spPr/>
+      </p:sp>
+      <p:sp>
+        <p:nvSpPr>
+          <p:cNvPr id="3" name="Notes Placeholder 2"/>
+          <p:cNvSpPr>
+            <a:spLocks noGrp="1"/>
+          </p:cNvSpPr>
+          <p:nvPr>
+            <p:ph type="body" idx="1"/>
+          </p:nvPr>
+        </p:nvSpPr>
+        <p:spPr/>
+        <p:txBody>
+          <a:bodyPr/>
+          <a:lstStyle/>
+          <a:p>
+            <a:r>
+              <a:t>Filings have stayed in the 8,000 to 11,500 per year band for seven years now. They peaked at 11,452 in 2021, fell, and rebounded to 8,800 in 2024 - a 7% jump - driven in part by the new Title II web accessibility deadlines for state and local entities. California is the clear leader with 3,252 filings; Texas had 224. Enforcement is not fading, it is becoming routine.</a:t>
             </a:r>
           </a:p>
         </p:txBody>
@@ -2211,103 +2274,6 @@
 </file>
 
 <file path=ppt/notesSlides/notesSlide5.xml><?xml version="1.0" encoding="utf-8"?>
-<p:notes xmlns:a="http://schemas.openxmlformats.org/drawingml/2006/main" xmlns:r="http://schemas.openxmlformats.org/officeDocument/2006/relationships" xmlns:p="http://schemas.openxmlformats.org/presentationml/2006/main" showMasterSp="0" showMasterPhAnim="0">
-  <p:cSld>
-    <p:spTree>
-      <p:nvGrpSpPr>
-        <p:cNvPr id="1" name="Shape 104"/>
-        <p:cNvGrpSpPr/>
-        <p:nvPr/>
-      </p:nvGrpSpPr>
-      <p:grpSpPr>
-        <a:xfrm>
-          <a:off x="0" y="0"/>
-          <a:ext cx="0" cy="0"/>
-          <a:chOff x="0" y="0"/>
-          <a:chExt cx="0" cy="0"/>
-        </a:xfrm>
-      </p:grpSpPr>
-      <p:sp>
-        <p:nvSpPr>
-          <p:cNvPr id="105" name="Google Shape;105;p5:notes"/>
-          <p:cNvSpPr txBox="1">
-            <a:spLocks noGrp="1"/>
-          </p:cNvSpPr>
-          <p:nvPr>
-            <p:ph type="body" idx="1"/>
-          </p:nvPr>
-        </p:nvSpPr>
-        <p:spPr>
-          <a:xfrm>
-            <a:off x="685800" y="4400550"/>
-            <a:ext cx="5486400" cy="3600450"/>
-          </a:xfrm>
-          <a:prstGeom prst="rect">
-            <a:avLst/>
-          </a:prstGeom>
-        </p:spPr>
-        <p:txBody>
-          <a:bodyPr spcFirstLastPara="1" wrap="square" lIns="91425" tIns="45700" rIns="91425" bIns="45700" anchor="t" anchorCtr="0">
-            <a:noAutofit/>
-          </a:bodyPr>
-          <a:lstStyle/>
-          <a:p>
-            <a:r>
-              <a:t>Total BOM is approximately $864 with the PCB run included - well under our $2000 capstone target. The biggest line is sensors at $270, then compute at $182, drivetrain at $144, power and chassis at about $100 each. For comparison, Daxbot, the closest commercial service, is $920,000 for 950 miles of surveying. STAR fits a completely different economic envelope.</a:t>
-            </a:r>
-          </a:p>
-        </p:txBody>
-      </p:sp>
-      <p:sp>
-        <p:nvSpPr>
-          <p:cNvPr id="106" name="Google Shape;106;p5:notes"/>
-          <p:cNvSpPr>
-            <a:spLocks noGrp="1" noRot="1" noChangeAspect="1"/>
-          </p:cNvSpPr>
-          <p:nvPr>
-            <p:ph type="sldImg" idx="2"/>
-          </p:nvPr>
-        </p:nvSpPr>
-        <p:spPr>
-          <a:xfrm>
-            <a:off x="685800" y="1143000"/>
-            <a:ext cx="5486400" cy="3086100"/>
-          </a:xfrm>
-          <a:custGeom>
-            <a:avLst/>
-            <a:gdLst/>
-            <a:ahLst/>
-            <a:cxnLst/>
-            <a:rect l="l" t="t" r="r" b="b"/>
-            <a:pathLst>
-              <a:path w="120000" h="120000" extrusionOk="0">
-                <a:moveTo>
-                  <a:pt x="0" y="0"/>
-                </a:moveTo>
-                <a:lnTo>
-                  <a:pt x="120000" y="0"/>
-                </a:lnTo>
-                <a:lnTo>
-                  <a:pt x="120000" y="120000"/>
-                </a:lnTo>
-                <a:lnTo>
-                  <a:pt x="0" y="120000"/>
-                </a:lnTo>
-                <a:close/>
-              </a:path>
-            </a:pathLst>
-          </a:custGeom>
-        </p:spPr>
-      </p:sp>
-    </p:spTree>
-  </p:cSld>
-  <p:clrMapOvr>
-    <a:masterClrMapping/>
-  </p:clrMapOvr>
-</p:notes>
-</file>
-
-<file path=ppt/notesSlides/notesSlide6.xml><?xml version="1.0" encoding="utf-8"?>
 <p:notes xmlns:a="http://schemas.openxmlformats.org/drawingml/2006/main" xmlns:r="http://schemas.openxmlformats.org/officeDocument/2006/relationships" xmlns:p="http://schemas.openxmlformats.org/presentationml/2006/main" showMasterSp="0" showMasterPhAnim="0">
   <p:cSld>
     <p:spTree>
@@ -2404,112 +2370,8 @@
 </p:notes>
 </file>
 
-<file path=ppt/notesSlides/notesSlide7.xml><?xml version="1.0" encoding="utf-8"?>
-<p:notes xmlns:a="http://schemas.openxmlformats.org/drawingml/2006/main" xmlns:r="http://schemas.openxmlformats.org/officeDocument/2006/relationships" xmlns:p="http://schemas.openxmlformats.org/presentationml/2006/main" showMasterSp="0" showMasterPhAnim="0">
-  <p:cSld>
-    <p:spTree>
-      <p:nvGrpSpPr>
-        <p:cNvPr id="1" name="Shape 122"/>
-        <p:cNvGrpSpPr/>
-        <p:nvPr/>
-      </p:nvGrpSpPr>
-      <p:grpSpPr>
-        <a:xfrm>
-          <a:off x="0" y="0"/>
-          <a:ext cx="0" cy="0"/>
-          <a:chOff x="0" y="0"/>
-          <a:chExt cx="0" cy="0"/>
-        </a:xfrm>
-      </p:grpSpPr>
-      <p:sp>
-        <p:nvSpPr>
-          <p:cNvPr id="123" name="Google Shape;123;p7:notes"/>
-          <p:cNvSpPr txBox="1">
-            <a:spLocks noGrp="1"/>
-          </p:cNvSpPr>
-          <p:nvPr>
-            <p:ph type="body" idx="1"/>
-          </p:nvPr>
-        </p:nvSpPr>
-        <p:spPr>
-          <a:xfrm>
-            <a:off x="685800" y="4400550"/>
-            <a:ext cx="5486400" cy="3600450"/>
-          </a:xfrm>
-          <a:prstGeom prst="rect">
-            <a:avLst/>
-          </a:prstGeom>
-        </p:spPr>
-        <p:txBody>
-          <a:bodyPr spcFirstLastPara="1" wrap="square" lIns="91425" tIns="45700" rIns="91425" bIns="45700" anchor="t" anchorCtr="0">
-            <a:noAutofit/>
-          </a:bodyPr>
-          <a:lstStyle/>
-          <a:p>
-            <a:pPr marL="0" lvl="0" indent="0" algn="l" rtl="0">
-              <a:spcBef>
-                <a:spcPts val="0"/>
-              </a:spcBef>
-              <a:spcAft>
-                <a:spcPts val="0"/>
-              </a:spcAft>
-              <a:buNone/>
-            </a:pPr>
-            <a:endParaRPr/>
-          </a:p>
-        </p:txBody>
-      </p:sp>
-      <p:sp>
-        <p:nvSpPr>
-          <p:cNvPr id="124" name="Google Shape;124;p7:notes"/>
-          <p:cNvSpPr>
-            <a:spLocks noGrp="1" noRot="1" noChangeAspect="1"/>
-          </p:cNvSpPr>
-          <p:nvPr>
-            <p:ph type="sldImg" idx="2"/>
-          </p:nvPr>
-        </p:nvSpPr>
-        <p:spPr>
-          <a:xfrm>
-            <a:off x="685800" y="1143000"/>
-            <a:ext cx="5486400" cy="3086100"/>
-          </a:xfrm>
-          <a:custGeom>
-            <a:avLst/>
-            <a:gdLst/>
-            <a:ahLst/>
-            <a:cxnLst/>
-            <a:rect l="l" t="t" r="r" b="b"/>
-            <a:pathLst>
-              <a:path w="120000" h="120000" extrusionOk="0">
-                <a:moveTo>
-                  <a:pt x="0" y="0"/>
-                </a:moveTo>
-                <a:lnTo>
-                  <a:pt x="120000" y="0"/>
-                </a:lnTo>
-                <a:lnTo>
-                  <a:pt x="120000" y="120000"/>
-                </a:lnTo>
-                <a:lnTo>
-                  <a:pt x="0" y="120000"/>
-                </a:lnTo>
-                <a:close/>
-              </a:path>
-            </a:pathLst>
-          </a:custGeom>
-        </p:spPr>
-      </p:sp>
-    </p:spTree>
-  </p:cSld>
-  <p:clrMapOvr>
-    <a:masterClrMapping/>
-  </p:clrMapOvr>
-</p:notes>
-</file>
-
-<file path=ppt/notesSlides/notesSlide8.xml><?xml version="1.0" encoding="utf-8"?>
-<p:notes xmlns:a="http://schemas.openxmlformats.org/drawingml/2006/main" xmlns:p="http://schemas.openxmlformats.org/presentationml/2006/main" xmlns:r="http://schemas.openxmlformats.org/officeDocument/2006/relationships">
+<file path=ppt/notesSlides/notesSlide6.xml><?xml version="1.0" encoding="utf-8"?>
+<p:notes xmlns:a="http://schemas.openxmlformats.org/drawingml/2006/main" xmlns:r="http://schemas.openxmlformats.org/officeDocument/2006/relationships" xmlns:p="http://schemas.openxmlformats.org/presentationml/2006/main">
   <p:cSld>
     <p:spTree>
       <p:nvGrpSpPr>
@@ -2529,7 +2391,7 @@
         <p:nvSpPr>
           <p:cNvPr id="2" name="Slide Image Placeholder 1"/>
           <p:cNvSpPr>
-            <a:spLocks noGrp="1"/>
+            <a:spLocks noGrp="1" noRot="1" noChangeAspect="1"/>
           </p:cNvSpPr>
           <p:nvPr>
             <p:ph type="sldImg" idx="3"/>
@@ -2553,7 +2415,147 @@
           <a:lstStyle/>
           <a:p>
             <a:r>
-              <a:t>Despite decades of legislation, 73% of public-facing facilities fail at least one ADA standard. 31 million Americans have mobility disabilities. Only 32% of property buyers ask about ADA at all. The audit gap is real and it is structural.</a:t>
+              <a:t>The pipeline: sensors stream into the RX72N which closes motor loops at 250 Hz. The RX72N talks to the Pi 5 via a framed serial link - architected as SPI at 10 MHz with FEC and HARQ for production, but deployed for defense as a simpler USB-CDC ASCII bridge at 115,200 baud. The Pi 5 runs slam_toolbox, an EKF that fuses wheel odometry with the IMU, and Nav2 for path planning. The compliance engine sits on top, reads the fused map, and emits a PDF audit report.</a:t>
+            </a:r>
+          </a:p>
+        </p:txBody>
+      </p:sp>
+      <p:sp>
+        <p:nvSpPr>
+          <p:cNvPr id="4" name="Slide Number Placeholder 3"/>
+          <p:cNvSpPr>
+            <a:spLocks noGrp="1"/>
+          </p:cNvSpPr>
+          <p:nvPr>
+            <p:ph type="sldNum" idx="12"/>
+          </p:nvPr>
+        </p:nvSpPr>
+        <p:spPr/>
+      </p:sp>
+    </p:spTree>
+  </p:cSld>
+  <p:clrMapOvr>
+    <a:masterClrMapping/>
+  </p:clrMapOvr>
+</p:notes>
+</file>
+
+<file path=ppt/notesSlides/notesSlide7.xml><?xml version="1.0" encoding="utf-8"?>
+<p:notes xmlns:a="http://schemas.openxmlformats.org/drawingml/2006/main" xmlns:r="http://schemas.openxmlformats.org/officeDocument/2006/relationships" xmlns:p="http://schemas.openxmlformats.org/presentationml/2006/main">
+  <p:cSld>
+    <p:spTree>
+      <p:nvGrpSpPr>
+        <p:cNvPr id="1" name=""/>
+        <p:cNvGrpSpPr/>
+        <p:nvPr/>
+      </p:nvGrpSpPr>
+      <p:grpSpPr>
+        <a:xfrm>
+          <a:off x="0" y="0"/>
+          <a:ext cx="0" cy="0"/>
+          <a:chOff x="0" y="0"/>
+          <a:chExt cx="0" cy="0"/>
+        </a:xfrm>
+      </p:grpSpPr>
+      <p:sp>
+        <p:nvSpPr>
+          <p:cNvPr id="2" name="Slide Image Placeholder 1"/>
+          <p:cNvSpPr>
+            <a:spLocks noGrp="1" noRot="1" noChangeAspect="1"/>
+          </p:cNvSpPr>
+          <p:nvPr>
+            <p:ph type="sldImg" idx="3"/>
+          </p:nvPr>
+        </p:nvSpPr>
+        <p:spPr/>
+      </p:sp>
+      <p:sp>
+        <p:nvSpPr>
+          <p:cNvPr id="3" name="Notes Placeholder 2"/>
+          <p:cNvSpPr>
+            <a:spLocks noGrp="1"/>
+          </p:cNvSpPr>
+          <p:nvPr>
+            <p:ph type="body" idx="1"/>
+          </p:nvPr>
+        </p:nvSpPr>
+        <p:spPr/>
+        <p:txBody>
+          <a:bodyPr/>
+          <a:lstStyle/>
+          <a:p>
+            <a:r>
+              <a:t>Seven ADA geometric checks, mapped to three status tiers. Ramp slope is fully IMPLEMENTED with measured ground truth. Trip hazard and path width are STRETCH - scaffolding exists, full algorithm pending. The other four are ARCHITECTED: every node has a Python file in the repo, message schemas exist, but the geometric logic is empty.</a:t>
+            </a:r>
+          </a:p>
+        </p:txBody>
+      </p:sp>
+      <p:sp>
+        <p:nvSpPr>
+          <p:cNvPr id="4" name="Slide Number Placeholder 3"/>
+          <p:cNvSpPr>
+            <a:spLocks noGrp="1"/>
+          </p:cNvSpPr>
+          <p:nvPr>
+            <p:ph type="sldNum" idx="12"/>
+          </p:nvPr>
+        </p:nvSpPr>
+        <p:spPr/>
+      </p:sp>
+    </p:spTree>
+  </p:cSld>
+  <p:clrMapOvr>
+    <a:masterClrMapping/>
+  </p:clrMapOvr>
+</p:notes>
+</file>
+
+<file path=ppt/notesSlides/notesSlide8.xml><?xml version="1.0" encoding="utf-8"?>
+<p:notes xmlns:a="http://schemas.openxmlformats.org/drawingml/2006/main" xmlns:r="http://schemas.openxmlformats.org/officeDocument/2006/relationships" xmlns:p="http://schemas.openxmlformats.org/presentationml/2006/main">
+  <p:cSld>
+    <p:spTree>
+      <p:nvGrpSpPr>
+        <p:cNvPr id="1" name=""/>
+        <p:cNvGrpSpPr/>
+        <p:nvPr/>
+      </p:nvGrpSpPr>
+      <p:grpSpPr>
+        <a:xfrm>
+          <a:off x="0" y="0"/>
+          <a:ext cx="0" cy="0"/>
+          <a:chOff x="0" y="0"/>
+          <a:chExt cx="0" cy="0"/>
+        </a:xfrm>
+      </p:grpSpPr>
+      <p:sp>
+        <p:nvSpPr>
+          <p:cNvPr id="2" name="Slide Image Placeholder 1"/>
+          <p:cNvSpPr>
+            <a:spLocks noGrp="1" noRot="1" noChangeAspect="1"/>
+          </p:cNvSpPr>
+          <p:nvPr>
+            <p:ph type="sldImg" idx="3"/>
+          </p:nvPr>
+        </p:nvSpPr>
+        <p:spPr/>
+      </p:sp>
+      <p:sp>
+        <p:nvSpPr>
+          <p:cNvPr id="3" name="Notes Placeholder 2"/>
+          <p:cNvSpPr>
+            <a:spLocks noGrp="1"/>
+          </p:cNvSpPr>
+          <p:nvPr>
+            <p:ph type="body" idx="1"/>
+          </p:nvPr>
+        </p:nvSpPr>
+        <p:spPr/>
+        <p:txBody>
+          <a:bodyPr/>
+          <a:lstStyle/>
+          <a:p>
+            <a:r>
+              <a:t>For the live demo: we start the robot in MANUAL mode from the Grafana cockpit. We hand it off to AUTONOMY, Nav2 takes over, and frontier exploration drives the robot into a hallway. As it approaches the ramp, the compliance engine fits a plane to the LiDAR returns using RANSAC and cross-validates that against the BNO055 IMU pitch. If the agreement is within 0.5 degrees and the slope exceeds 4.76 degrees, the engine flags a Title III violation and logs the ground-truth measurement to the audit report.</a:t>
             </a:r>
           </a:p>
         </p:txBody>
@@ -2579,7 +2581,7 @@
 </file>
 
 <file path=ppt/notesSlides/notesSlide9.xml><?xml version="1.0" encoding="utf-8"?>
-<p:notes xmlns:a="http://schemas.openxmlformats.org/drawingml/2006/main" xmlns:p="http://schemas.openxmlformats.org/presentationml/2006/main" xmlns:r="http://schemas.openxmlformats.org/officeDocument/2006/relationships">
+<p:notes xmlns:a="http://schemas.openxmlformats.org/drawingml/2006/main" xmlns:r="http://schemas.openxmlformats.org/officeDocument/2006/relationships" xmlns:p="http://schemas.openxmlformats.org/presentationml/2006/main">
   <p:cSld>
     <p:spTree>
       <p:nvGrpSpPr>
@@ -2599,7 +2601,7 @@
         <p:nvSpPr>
           <p:cNvPr id="2" name="Slide Image Placeholder 1"/>
           <p:cNvSpPr>
-            <a:spLocks noGrp="1"/>
+            <a:spLocks noGrp="1" noRot="1" noChangeAspect="1"/>
           </p:cNvSpPr>
           <p:nvPr>
             <p:ph type="sldImg" idx="3"/>
@@ -2623,7 +2625,7 @@
           <a:lstStyle/>
           <a:p>
             <a:r>
-              <a:t>Filings have stayed in the 8,000 to 11,500 per year band for seven years now. They peaked at 11,452 in 2021, fell, and rebounded to 8,800 in 2024 - a 7% jump - driven in part by the new Title II web accessibility deadlines for state and local entities. California is the clear leader with 3,252 filings; Texas had 224. Enforcement is not fading, it is becoming routine.</a:t>
+              <a:t>Validation in three layers. Software: 60 firmware Unity tests passing at 100% library coverage, 74% gateway coverage, 14 ROS 2 tests, 12 compliance pytest modules. Hardware: nine manual PCB validation checks, all passing first-pass, including motor free-spin and loaded-chassis with current measurements and scope-probed PWM. Field: we mapped 200 square feet of Thompson Hall on the Texas A&amp;M campus and detected two ADA compliance issues.</a:t>
             </a:r>
           </a:p>
         </p:txBody>
@@ -7093,7 +7095,7 @@
         </p:spPr>
         <p:txBody>
           <a:bodyPr spcFirstLastPara="1" wrap="square" lIns="91425" tIns="45700" rIns="91425" bIns="45700" anchor="t" anchorCtr="0">
-            <a:normAutofit fontScale="92500" lnSpcReduction="20000"/>
+            <a:normAutofit fontScale="77500" lnSpcReduction="20000"/>
           </a:bodyPr>
           <a:lstStyle/>
           <a:p>
@@ -7242,6 +7244,7 @@
           <a:lstStyle/>
           <a:p>
             <a:pPr algn="ctr"/>
+            <a:endParaRPr/>
           </a:p>
         </p:txBody>
       </p:sp>
@@ -7269,7 +7272,7 @@
           <a:p>
             <a:pPr algn="ctr"/>
             <a:r>
-              <a:rPr b="1" sz="1200">
+              <a:rPr sz="1200" b="1">
                 <a:solidFill>
                   <a:srgbClr val="500000"/>
                 </a:solidFill>
@@ -7281,7 +7284,7 @@
           <a:p>
             <a:pPr algn="ctr"/>
             <a:r>
-              <a:rPr b="0" sz="1200">
+              <a:rPr sz="1200" b="0">
                 <a:solidFill>
                   <a:srgbClr val="500000"/>
                 </a:solidFill>
@@ -7360,7 +7363,7 @@
               <a:buNone/>
             </a:pPr>
             <a:r>
-              <a:rPr lang="en-US" sz="1800" dirty="0" err="1">
+              <a:rPr lang="en-US" sz="1600" dirty="0" err="1">
                 <a:solidFill>
                   <a:schemeClr val="lt1"/>
                 </a:solidFill>
@@ -7369,9 +7372,9 @@
                 <a:cs typeface="Arial" panose="020B0604020202020204" pitchFamily="34" charset="0"/>
                 <a:sym typeface="Calibri"/>
               </a:rPr>
-              <a:t>Total BOM: ~$864 with PCB run, well under the $2,000 capstone target.</a:t>
+              <a:t>Design BOM ~$864; ordered total ~$1,249 component cost (~$1,549 with shipping). Well under the $2,000 capstone target.</a:t>
             </a:r>
-            <a:endParaRPr sz="1200" dirty="0">
+            <a:endParaRPr sz="1100" dirty="0">
               <a:latin typeface="Arial" panose="020B0604020202020204" pitchFamily="34" charset="0"/>
               <a:ea typeface="Open Sans" panose="020B0606030504020204" pitchFamily="34" charset="0"/>
               <a:cs typeface="Arial" panose="020B0604020202020204" pitchFamily="34" charset="0"/>
@@ -7396,7 +7399,7 @@
               <a:buNone/>
             </a:pPr>
             <a:r>
-              <a:rPr lang="en-US" sz="1800" dirty="0" err="1">
+              <a:rPr lang="en-US" sz="1600" dirty="0" err="1">
                 <a:solidFill>
                   <a:schemeClr val="lt1"/>
                 </a:solidFill>
@@ -7407,7 +7410,7 @@
               </a:rPr>
               <a:t>Compute $182 (Pi 5, RX72N, PCB) - Sensors $270 (LiDAR, stereo, IMU, sonar) - Drivetrain $144 (motors, drivers, wheels) - Power $108 (battery, BMS, regulators) - Chassis $100</a:t>
             </a:r>
-            <a:endParaRPr sz="1200" dirty="0">
+            <a:endParaRPr sz="1100" dirty="0">
               <a:latin typeface="Arial" panose="020B0604020202020204" pitchFamily="34" charset="0"/>
               <a:ea typeface="Open Sans" panose="020B0606030504020204" pitchFamily="34" charset="0"/>
               <a:cs typeface="Arial" panose="020B0604020202020204" pitchFamily="34" charset="0"/>
@@ -7432,7 +7435,7 @@
               <a:buNone/>
             </a:pPr>
             <a:r>
-              <a:rPr lang="en-US" sz="1800" dirty="0" err="1">
+              <a:rPr lang="en-US" sz="1600" dirty="0" err="1">
                 <a:solidFill>
                   <a:schemeClr val="lt1"/>
                 </a:solidFill>
@@ -7443,7 +7446,7 @@
               </a:rPr>
               <a:t>Daxbot service-as-a-product is $920k for 950 surveyed miles. STAR is sub-$2k recurring near-zero. Different economics entirely.</a:t>
             </a:r>
-            <a:endParaRPr sz="1200" dirty="0">
+            <a:endParaRPr sz="1100" dirty="0">
               <a:latin typeface="Arial" panose="020B0604020202020204" pitchFamily="34" charset="0"/>
               <a:ea typeface="Open Sans" panose="020B0606030504020204" pitchFamily="34" charset="0"/>
               <a:cs typeface="Arial" panose="020B0604020202020204" pitchFamily="34" charset="0"/>
@@ -7528,8 +7531,8 @@
         </p:blipFill>
         <p:spPr>
           <a:xfrm>
-            <a:off x="5557838" y="2312194"/>
-            <a:ext cx="6172200" cy="3471862"/>
+            <a:off x="5759719" y="2359719"/>
+            <a:ext cx="6001933" cy="3376087"/>
           </a:xfrm>
           <a:prstGeom prst="rect">
             <a:avLst/>
@@ -8701,7 +8704,7 @@
               <a:buNone/>
             </a:pPr>
             <a:r>
-              <a:rPr lang="en-US" sz="1800" dirty="0" err="1">
+              <a:rPr lang="en-US" sz="1800" dirty="0">
                 <a:solidFill>
                   <a:schemeClr val="lt1"/>
                 </a:solidFill>
@@ -8737,7 +8740,7 @@
               <a:buNone/>
             </a:pPr>
             <a:r>
-              <a:rPr lang="en-US" sz="1800" dirty="0" err="1">
+              <a:rPr lang="en-US" sz="1800" dirty="0">
                 <a:solidFill>
                   <a:schemeClr val="lt1"/>
                 </a:solidFill>
@@ -8773,7 +8776,7 @@
               <a:buNone/>
             </a:pPr>
             <a:r>
-              <a:rPr lang="en-US" sz="1800" dirty="0" err="1">
+              <a:rPr lang="en-US" sz="1800" dirty="0">
                 <a:solidFill>
                   <a:schemeClr val="lt1"/>
                 </a:solidFill>
@@ -8801,7 +8804,7 @@
         <p:spPr>
           <a:xfrm>
             <a:off x="492760" y="554989"/>
-            <a:ext cx="6579259" cy="1247366"/>
+            <a:ext cx="8393663" cy="1247366"/>
           </a:xfrm>
           <a:prstGeom prst="rect">
             <a:avLst/>
@@ -8893,6 +8896,7 @@
           <a:lstStyle/>
           <a:p>
             <a:pPr algn="ctr"/>
+            <a:endParaRPr/>
           </a:p>
         </p:txBody>
       </p:sp>
@@ -8913,14 +8917,14 @@
           <a:noFill/>
         </p:spPr>
         <p:txBody>
-          <a:bodyPr wrap="square" lIns="365760" rIns="365760" tIns="457200" bIns="457200" anchor="ctr">
+          <a:bodyPr wrap="square" lIns="365760" tIns="457200" rIns="365760" bIns="457200" anchor="ctr">
             <a:spAutoFit/>
           </a:bodyPr>
           <a:lstStyle/>
           <a:p>
             <a:pPr algn="ctr"/>
             <a:r>
-              <a:rPr b="1" sz="5600">
+              <a:rPr sz="5600" b="1">
                 <a:solidFill>
                   <a:srgbClr val="500000"/>
                 </a:solidFill>
@@ -8932,7 +8936,7 @@
           <a:p>
             <a:pPr algn="ctr"/>
             <a:r>
-              <a:rPr b="0" sz="2000">
+              <a:rPr sz="2000" b="0">
                 <a:solidFill>
                   <a:srgbClr val="500000"/>
                 </a:solidFill>
@@ -8943,20 +8947,17 @@
           </a:p>
           <a:p>
             <a:pPr algn="ctr"/>
-            <a:r>
-              <a:rPr b="0" sz="2000">
-                <a:solidFill>
-                  <a:srgbClr val="500000"/>
-                </a:solidFill>
-                <a:latin typeface="Arial"/>
-              </a:rPr>
-              <a:t/>
-            </a:r>
+            <a:endParaRPr sz="2000" b="0">
+              <a:solidFill>
+                <a:srgbClr val="500000"/>
+              </a:solidFill>
+              <a:latin typeface="Arial"/>
+            </a:endParaRPr>
           </a:p>
           <a:p>
             <a:pPr algn="ctr"/>
             <a:r>
-              <a:rPr b="1" sz="5600">
+              <a:rPr sz="5600" b="1">
                 <a:solidFill>
                   <a:srgbClr val="500000"/>
                 </a:solidFill>
@@ -8968,7 +8969,7 @@
           <a:p>
             <a:pPr algn="ctr"/>
             <a:r>
-              <a:rPr b="0" sz="2000">
+              <a:rPr sz="2000" b="0">
                 <a:solidFill>
                   <a:srgbClr val="500000"/>
                 </a:solidFill>
@@ -9056,7 +9057,7 @@
                 <a:cs typeface="Arial" panose="020B0604020202020204" pitchFamily="34" charset="0"/>
                 <a:sym typeface="Calibri"/>
               </a:rPr>
-              <a:t>73 percent of public-facing facilities fail at least one ADA standard at survey.</a:t>
+              <a:t>Per Building Principles CASp (2024 industry estimate), 73 percent of U.S. commercial buildings fail at least one ADA standard.</a:t>
             </a:r>
             <a:endParaRPr sz="1200" dirty="0">
               <a:latin typeface="Arial" panose="020B0604020202020204" pitchFamily="34" charset="0"/>
@@ -9092,43 +9093,7 @@
                 <a:cs typeface="Arial" panose="020B0604020202020204" pitchFamily="34" charset="0"/>
                 <a:sym typeface="Calibri"/>
               </a:rPr>
-              <a:t>31 million U.S. adults (12.2 percent) report mobility disabilities, per CDC.</a:t>
-            </a:r>
-            <a:endParaRPr sz="1200" dirty="0">
-              <a:latin typeface="Arial" panose="020B0604020202020204" pitchFamily="34" charset="0"/>
-              <a:ea typeface="Open Sans" panose="020B0606030504020204" pitchFamily="34" charset="0"/>
-              <a:cs typeface="Arial" panose="020B0604020202020204" pitchFamily="34" charset="0"/>
-            </a:endParaRPr>
-          </a:p>
-          <a:p>
-            <a:pPr marL="0" marR="0" lvl="0" indent="0" algn="l" rtl="0">
-              <a:lnSpc>
-                <a:spcPct val="150000"/>
-              </a:lnSpc>
-              <a:spcBef>
-                <a:spcPts val="1000"/>
-              </a:spcBef>
-              <a:spcAft>
-                <a:spcPts val="0"/>
-              </a:spcAft>
-              <a:buClr>
-                <a:schemeClr val="lt1"/>
-              </a:buClr>
-              <a:buSzPts val="2000"/>
-              <a:buFont typeface="Arial"/>
-              <a:buNone/>
-            </a:pPr>
-            <a:r>
-              <a:rPr lang="en-US" sz="1800" dirty="0" err="1">
-                <a:solidFill>
-                  <a:schemeClr val="lt1"/>
-                </a:solidFill>
-                <a:latin typeface="Arial" panose="020B0604020202020204" pitchFamily="34" charset="0"/>
-                <a:ea typeface="Open Sans" panose="020B0606030504020204" pitchFamily="34" charset="0"/>
-                <a:cs typeface="Arial" panose="020B0604020202020204" pitchFamily="34" charset="0"/>
-                <a:sym typeface="Calibri"/>
-              </a:rPr>
-              <a:t>Only 32 percent of U.S. property buyers ask about ADA compliance during diligence.</a:t>
+              <a:t>12.2 percent of U.S. adults (CDC) report mobility disabilities -- approximately 31 million people.</a:t>
             </a:r>
             <a:endParaRPr sz="1200" dirty="0">
               <a:latin typeface="Arial" panose="020B0604020202020204" pitchFamily="34" charset="0"/>
@@ -9147,7 +9112,7 @@
         <p:spPr>
           <a:xfrm>
             <a:off x="492760" y="554989"/>
-            <a:ext cx="6579259" cy="1247366"/>
+            <a:ext cx="8136085" cy="1247366"/>
           </a:xfrm>
           <a:prstGeom prst="rect">
             <a:avLst/>
@@ -9208,15 +9173,15 @@
           <p:nvPr/>
         </p:nvPicPr>
         <p:blipFill>
-          <a:blip r:embed="rId2"/>
+          <a:blip r:embed="rId3"/>
           <a:stretch>
             <a:fillRect/>
           </a:stretch>
         </p:blipFill>
         <p:spPr>
           <a:xfrm>
-            <a:off x="5557838" y="2312194"/>
-            <a:ext cx="6172200" cy="3471862"/>
+            <a:off x="5860491" y="2498937"/>
+            <a:ext cx="5734618" cy="3225722"/>
           </a:xfrm>
           <a:prstGeom prst="rect">
             <a:avLst/>
@@ -9372,7 +9337,7 @@
                 <a:cs typeface="Arial" panose="020B0604020202020204" pitchFamily="34" charset="0"/>
                 <a:sym typeface="Calibri"/>
               </a:rPr>
-              <a:t>Title II web-accessibility deadline (April 2026 for state and local) drove a 7 percent year-over-year increase.</a:t>
+              <a:t>Title II web-accessibility rule (DOJ Apr 2024, deadlines extended Apr 2026 to Apr 2027 and Apr 2028) coincided with a 7 pct year-over-year rebound.</a:t>
             </a:r>
             <a:endParaRPr sz="1200" dirty="0">
               <a:latin typeface="Arial" panose="020B0604020202020204" pitchFamily="34" charset="0"/>
@@ -9391,7 +9356,7 @@
         <p:spPr>
           <a:xfrm>
             <a:off x="492760" y="554989"/>
-            <a:ext cx="6579259" cy="1247366"/>
+            <a:ext cx="10339363" cy="1247366"/>
           </a:xfrm>
           <a:prstGeom prst="rect">
             <a:avLst/>
@@ -9425,7 +9390,7 @@
               <a:buNone/>
             </a:pPr>
             <a:r>
-              <a:rPr lang="en-US" sz="5400" b="1" i="1" dirty="0">
+              <a:rPr lang="en-US" sz="4800" b="1" i="1" dirty="0">
                 <a:solidFill>
                   <a:schemeClr val="lt1"/>
                 </a:solidFill>
@@ -9436,7 +9401,7 @@
               </a:rPr>
               <a:t>Enforcement is accelerating</a:t>
             </a:r>
-            <a:endParaRPr b="1" i="1" dirty="0">
+            <a:endParaRPr sz="1200" b="1" i="1" dirty="0">
               <a:latin typeface="Arial Black" panose="020B0604020202020204" pitchFamily="34" charset="0"/>
               <a:cs typeface="Arial Black" panose="020B0604020202020204" pitchFamily="34" charset="0"/>
             </a:endParaRPr>
@@ -9452,15 +9417,15 @@
           <p:nvPr/>
         </p:nvPicPr>
         <p:blipFill>
-          <a:blip r:embed="rId2"/>
+          <a:blip r:embed="rId3"/>
           <a:stretch>
             <a:fillRect/>
           </a:stretch>
         </p:blipFill>
         <p:spPr>
           <a:xfrm>
-            <a:off x="5557838" y="2312194"/>
-            <a:ext cx="6172200" cy="3471862"/>
+            <a:off x="6096000" y="2609779"/>
+            <a:ext cx="5335227" cy="3001065"/>
           </a:xfrm>
           <a:prstGeom prst="rect">
             <a:avLst/>
@@ -9987,7 +9952,7 @@
                 <a:cs typeface="Arial" panose="020B0604020202020204" pitchFamily="34" charset="0"/>
                 <a:sym typeface="Calibri"/>
               </a:rPr>
-              <a:t>slam_toolbox (async)</a:t>
+              <a:t>slam_toolbox (mapping mode)</a:t>
             </a:r>
             <a:endParaRPr sz="1200" dirty="0">
               <a:latin typeface="Arial" panose="020B0604020202020204" pitchFamily="34" charset="0"/>
@@ -10023,7 +9988,7 @@
                 <a:cs typeface="Arial" panose="020B0604020202020204" pitchFamily="34" charset="0"/>
                 <a:sym typeface="Calibri"/>
               </a:rPr>
-              <a:t>Nav2 + DWB controller</a:t>
+              <a:t>Nav2 + RegulatedPurePursuit</a:t>
             </a:r>
             <a:endParaRPr sz="1200" dirty="0">
               <a:latin typeface="Arial" panose="020B0604020202020204" pitchFamily="34" charset="0"/>
@@ -10506,7 +10471,7 @@
           </a:bodyPr>
           <a:lstStyle/>
           <a:p>
-            <a:pPr marL="0" marR="0" lvl="0" indent="0" algn="l" rtl="0">
+            <a:pPr marL="285750" marR="0" lvl="0" indent="-285750" algn="l" rtl="0">
               <a:lnSpc>
                 <a:spcPct val="150000"/>
               </a:lnSpc>
@@ -10520,11 +10485,11 @@
                 <a:schemeClr val="lt1"/>
               </a:buClr>
               <a:buSzPts val="2000"/>
-              <a:buFont typeface="Arial"/>
-              <a:buNone/>
+              <a:buFont typeface="Arial" panose="020B0604020202020204" pitchFamily="34" charset="0"/>
+              <a:buChar char="•"/>
             </a:pPr>
             <a:r>
-              <a:rPr lang="en-US" sz="1800" dirty="0" err="1">
+              <a:rPr lang="en-US" sz="1600" dirty="0" err="1">
                 <a:solidFill>
                   <a:schemeClr val="lt1"/>
                 </a:solidFill>
@@ -10535,14 +10500,14 @@
               </a:rPr>
               <a:t>Sensors feed the RX72N for hard-real-time motor control at 250 Hz.</a:t>
             </a:r>
-            <a:endParaRPr sz="1200" dirty="0">
+            <a:endParaRPr sz="1100" dirty="0">
               <a:latin typeface="Arial" panose="020B0604020202020204" pitchFamily="34" charset="0"/>
               <a:ea typeface="Open Sans" panose="020B0606030504020204" pitchFamily="34" charset="0"/>
               <a:cs typeface="Arial" panose="020B0604020202020204" pitchFamily="34" charset="0"/>
             </a:endParaRPr>
           </a:p>
           <a:p>
-            <a:pPr marL="0" marR="0" lvl="0" indent="0" algn="l" rtl="0">
+            <a:pPr marL="285750" marR="0" lvl="0" indent="-285750" algn="l" rtl="0">
               <a:lnSpc>
                 <a:spcPct val="150000"/>
               </a:lnSpc>
@@ -10556,11 +10521,11 @@
                 <a:schemeClr val="lt1"/>
               </a:buClr>
               <a:buSzPts val="2000"/>
-              <a:buFont typeface="Arial"/>
-              <a:buNone/>
+              <a:buFont typeface="Arial" panose="020B0604020202020204" pitchFamily="34" charset="0"/>
+              <a:buChar char="•"/>
             </a:pPr>
             <a:r>
-              <a:rPr lang="en-US" sz="1800" dirty="0" err="1">
+              <a:rPr lang="en-US" sz="1600" dirty="0" err="1">
                 <a:solidFill>
                   <a:schemeClr val="lt1"/>
                 </a:solidFill>
@@ -10571,14 +10536,14 @@
               </a:rPr>
               <a:t>RX72N talks to the Pi 5 over a framed transport: SPI 10 MHz with FEC and HARQ is the architected production link; USB-CDC ASCII at 115200 baud is the deployed link for capstone defense.</a:t>
             </a:r>
-            <a:endParaRPr sz="1200" dirty="0">
+            <a:endParaRPr sz="1100" dirty="0">
               <a:latin typeface="Arial" panose="020B0604020202020204" pitchFamily="34" charset="0"/>
               <a:ea typeface="Open Sans" panose="020B0606030504020204" pitchFamily="34" charset="0"/>
               <a:cs typeface="Arial" panose="020B0604020202020204" pitchFamily="34" charset="0"/>
             </a:endParaRPr>
           </a:p>
           <a:p>
-            <a:pPr marL="0" marR="0" lvl="0" indent="0" algn="l" rtl="0">
+            <a:pPr marL="285750" marR="0" lvl="0" indent="-285750" algn="l" rtl="0">
               <a:lnSpc>
                 <a:spcPct val="150000"/>
               </a:lnSpc>
@@ -10592,11 +10557,11 @@
                 <a:schemeClr val="lt1"/>
               </a:buClr>
               <a:buSzPts val="2000"/>
-              <a:buFont typeface="Arial"/>
-              <a:buNone/>
+              <a:buFont typeface="Arial" panose="020B0604020202020204" pitchFamily="34" charset="0"/>
+              <a:buChar char="•"/>
             </a:pPr>
             <a:r>
-              <a:rPr lang="en-US" sz="1800" dirty="0" err="1">
+              <a:rPr lang="en-US" sz="1600" dirty="0" err="1">
                 <a:solidFill>
                   <a:schemeClr val="lt1"/>
                 </a:solidFill>
@@ -10607,7 +10572,7 @@
               </a:rPr>
               <a:t>Pi 5 runs slam_toolbox, robot_localization EKF, and Nav2. The compliance engine reads the fused map and emits a structured PDF report.</a:t>
             </a:r>
-            <a:endParaRPr sz="1200" dirty="0">
+            <a:endParaRPr sz="1100" dirty="0">
               <a:latin typeface="Arial" panose="020B0604020202020204" pitchFamily="34" charset="0"/>
               <a:ea typeface="Open Sans" panose="020B0606030504020204" pitchFamily="34" charset="0"/>
               <a:cs typeface="Arial" panose="020B0604020202020204" pitchFamily="34" charset="0"/>
@@ -10624,7 +10589,7 @@
         <p:spPr>
           <a:xfrm>
             <a:off x="492760" y="554989"/>
-            <a:ext cx="6579259" cy="1247366"/>
+            <a:ext cx="8894719" cy="1247366"/>
           </a:xfrm>
           <a:prstGeom prst="rect">
             <a:avLst/>
@@ -10685,15 +10650,15 @@
           <p:nvPr/>
         </p:nvPicPr>
         <p:blipFill>
-          <a:blip r:embed="rId2"/>
+          <a:blip r:embed="rId3"/>
           <a:stretch>
             <a:fillRect/>
           </a:stretch>
         </p:blipFill>
         <p:spPr>
           <a:xfrm>
-            <a:off x="5557838" y="2312194"/>
-            <a:ext cx="6172200" cy="3471862"/>
+            <a:off x="5904120" y="2458282"/>
+            <a:ext cx="5662271" cy="3185027"/>
           </a:xfrm>
           <a:prstGeom prst="rect">
             <a:avLst/>
@@ -10734,7 +10699,7 @@
         <p:spPr>
           <a:xfrm>
             <a:off x="492760" y="554989"/>
-            <a:ext cx="6579259" cy="1247366"/>
+            <a:ext cx="8829791" cy="1247366"/>
           </a:xfrm>
           <a:prstGeom prst="rect">
             <a:avLst/>
@@ -11144,7 +11109,7 @@
                 <a:cs typeface="Arial Black" panose="020B0604020202020204" pitchFamily="34" charset="0"/>
                 <a:sym typeface="Open Sans ExtraBold"/>
               </a:rPr>
-              <a:t>ARCHITECTED</a:t>
+              <a:t>Existing but not tested due to limitations with motors:</a:t>
             </a:r>
           </a:p>
           <a:p>
@@ -11274,7 +11239,7 @@
               <a:buNone/>
             </a:pPr>
             <a:r>
-              <a:rPr lang="en-US" dirty="0" err="1">
+              <a:rPr lang="en-US" dirty="0">
                 <a:solidFill>
                   <a:srgbClr val="5D0025"/>
                 </a:solidFill>
@@ -11284,42 +11249,6 @@
                 <a:sym typeface="Calibri"/>
               </a:rPr>
               <a:t>Door threshold (404.2.5)</a:t>
-            </a:r>
-            <a:endParaRPr sz="1200" dirty="0">
-              <a:latin typeface="Arial" panose="020B0604020202020204" pitchFamily="34" charset="0"/>
-              <a:ea typeface="Open Sans" panose="020B0606030504020204" pitchFamily="34" charset="0"/>
-              <a:cs typeface="Arial" panose="020B0604020202020204" pitchFamily="34" charset="0"/>
-            </a:endParaRPr>
-          </a:p>
-          <a:p>
-            <a:pPr marL="0" marR="0" lvl="0" indent="0" algn="l" rtl="0">
-              <a:lnSpc>
-                <a:spcPct val="100000"/>
-              </a:lnSpc>
-              <a:spcBef>
-                <a:spcPts val="1000"/>
-              </a:spcBef>
-              <a:spcAft>
-                <a:spcPts val="0"/>
-              </a:spcAft>
-              <a:buClr>
-                <a:srgbClr val="5D0025"/>
-              </a:buClr>
-              <a:buSzPts val="1600"/>
-              <a:buFont typeface="Arial"/>
-              <a:buNone/>
-            </a:pPr>
-            <a:r>
-              <a:rPr lang="en-US" dirty="0" err="1">
-                <a:solidFill>
-                  <a:srgbClr val="5D0025"/>
-                </a:solidFill>
-                <a:latin typeface="Arial" panose="020B0604020202020204" pitchFamily="34" charset="0"/>
-                <a:ea typeface="Open Sans" panose="020B0606030504020204" pitchFamily="34" charset="0"/>
-                <a:cs typeface="Arial" panose="020B0604020202020204" pitchFamily="34" charset="0"/>
-                <a:sym typeface="Calibri"/>
-              </a:rPr>
-              <a:t>Node skeletons committed; bodies pending</a:t>
             </a:r>
             <a:endParaRPr sz="1200" dirty="0">
               <a:latin typeface="Arial" panose="020B0604020202020204" pitchFamily="34" charset="0"/>
@@ -11558,15 +11487,15 @@
           <p:nvPr/>
         </p:nvPicPr>
         <p:blipFill>
-          <a:blip r:embed="rId2"/>
+          <a:blip r:embed="rId3"/>
           <a:stretch>
             <a:fillRect/>
           </a:stretch>
         </p:blipFill>
         <p:spPr>
           <a:xfrm>
-            <a:off x="5557838" y="2180412"/>
-            <a:ext cx="6172200" cy="3735426"/>
+            <a:off x="6039386" y="2380607"/>
+            <a:ext cx="5534143" cy="3349273"/>
           </a:xfrm>
           <a:prstGeom prst="rect">
             <a:avLst/>
@@ -11623,7 +11552,7 @@
           </a:bodyPr>
           <a:lstStyle/>
           <a:p>
-            <a:pPr marL="0" marR="0" lvl="0" indent="0" algn="l" rtl="0">
+            <a:pPr marL="285750" marR="0" lvl="0" indent="-285750" algn="l" rtl="0">
               <a:lnSpc>
                 <a:spcPct val="150000"/>
               </a:lnSpc>
@@ -11637,8 +11566,8 @@
                 <a:schemeClr val="lt1"/>
               </a:buClr>
               <a:buSzPts val="2000"/>
-              <a:buFont typeface="Arial"/>
-              <a:buNone/>
+              <a:buFont typeface="Arial" panose="020B0604020202020204" pitchFamily="34" charset="0"/>
+              <a:buChar char="•"/>
             </a:pPr>
             <a:r>
               <a:rPr lang="en-US" sz="1800" dirty="0" err="1">
@@ -11659,7 +11588,7 @@
             </a:endParaRPr>
           </a:p>
           <a:p>
-            <a:pPr marL="0" marR="0" lvl="0" indent="0" algn="l" rtl="0">
+            <a:pPr marL="285750" marR="0" lvl="0" indent="-285750" algn="l" rtl="0">
               <a:lnSpc>
                 <a:spcPct val="150000"/>
               </a:lnSpc>
@@ -11673,11 +11602,11 @@
                 <a:schemeClr val="lt1"/>
               </a:buClr>
               <a:buSzPts val="2000"/>
-              <a:buFont typeface="Arial"/>
-              <a:buNone/>
+              <a:buFont typeface="Arial" panose="020B0604020202020204" pitchFamily="34" charset="0"/>
+              <a:buChar char="•"/>
             </a:pPr>
             <a:r>
-              <a:rPr lang="en-US" sz="1800" dirty="0" err="1">
+              <a:rPr lang="en-US" sz="1800" dirty="0">
                 <a:solidFill>
                   <a:schemeClr val="lt1"/>
                 </a:solidFill>
@@ -11686,7 +11615,7 @@
                 <a:cs typeface="Arial" panose="020B0604020202020204" pitchFamily="34" charset="0"/>
                 <a:sym typeface="Calibri"/>
               </a:rPr>
-              <a:t>Hardware: 9 manual PCB checks all PASS -- continuity, motor free-spin + loaded chassis with DC current, scoped PWM, AD2-probed comm.</a:t>
+              <a:t>Hardware: 9 manual PCB checks all PASS: continuity, motor free-spin + loaded chassis with DC current, scoped PWM, AD2-probed comm.</a:t>
             </a:r>
             <a:endParaRPr sz="1200" dirty="0">
               <a:latin typeface="Arial" panose="020B0604020202020204" pitchFamily="34" charset="0"/>
@@ -11695,7 +11624,7 @@
             </a:endParaRPr>
           </a:p>
           <a:p>
-            <a:pPr marL="0" marR="0" lvl="0" indent="0" algn="l" rtl="0">
+            <a:pPr marL="285750" marR="0" lvl="0" indent="-285750" algn="l" rtl="0">
               <a:lnSpc>
                 <a:spcPct val="150000"/>
               </a:lnSpc>
@@ -11709,8 +11638,8 @@
                 <a:schemeClr val="lt1"/>
               </a:buClr>
               <a:buSzPts val="2000"/>
-              <a:buFont typeface="Arial"/>
-              <a:buNone/>
+              <a:buFont typeface="Arial" panose="020B0604020202020204" pitchFamily="34" charset="0"/>
+              <a:buChar char="•"/>
             </a:pPr>
             <a:r>
               <a:rPr lang="en-US" sz="1800" dirty="0" err="1">
@@ -11722,7 +11651,7 @@
                 <a:cs typeface="Arial" panose="020B0604020202020204" pitchFamily="34" charset="0"/>
                 <a:sym typeface="Calibri"/>
               </a:rPr>
-              <a:t>Field: 200 sq ft autonomous scan in Thompson Hall (right). Two issues detected: slope &gt; 1:12, path &lt; 36 in.</a:t>
+              <a:t>Field: autonomous frontier-exploration scan of a Thompson Hall hallway (right); demo run flags ramp-slope and path-width violations.</a:t>
             </a:r>
             <a:endParaRPr sz="1200" dirty="0">
               <a:latin typeface="Arial" panose="020B0604020202020204" pitchFamily="34" charset="0"/>
@@ -11802,15 +11731,15 @@
           <p:nvPr/>
         </p:nvPicPr>
         <p:blipFill>
-          <a:blip r:embed="rId2"/>
+          <a:blip r:embed="rId3"/>
           <a:stretch>
             <a:fillRect/>
           </a:stretch>
         </p:blipFill>
         <p:spPr>
           <a:xfrm>
-            <a:off x="6513924" y="1990725"/>
-            <a:ext cx="4260028" cy="4114800"/>
+            <a:off x="6830913" y="2160615"/>
+            <a:ext cx="4040865" cy="3903108"/>
           </a:xfrm>
           <a:prstGeom prst="rect">
             <a:avLst/>
